--- a/content/W04/D3/slides/C2_W04_D03_half1_STUDENT.pptx
+++ b/content/W04/D3/slides/C2_W04_D03_half1_STUDENT.pptx
@@ -3632,7 +3632,7 @@
           </a:p>
           <a:p>
             <a:r>
-              <a:t>watches biscuit, which Monday's faculty session (tentative) and Week 5 take up. Transition: a carry bag.</a:t>
+              <a:t>watches biscuit, which Monday's faculty session on A/B testing (tentative) took up. Transition: a carry bag.</a:t>
             </a:r>
           </a:p>
         </p:txBody>
@@ -13091,7 +13091,7 @@
                 </a:solidFill>
                 <a:latin typeface="Calibri"/>
               </a:rPr>
-              <a:t>Week 4 Day 3: what goes with what, beyond chance</a:t>
+              <a:t>Week 4, Day 3. Instamart Pune: strip click-through fell from 6.1 to 3.8 percent</a:t>
             </a:r>
           </a:p>
         </p:txBody>
@@ -28170,7 +28170,7 @@
                 </a:solidFill>
                 <a:latin typeface="Calibri"/>
               </a:rPr>
-              <a:t>Week 4 Day 3: what goes with what, beyond chance</a:t>
+              <a:t>Week 4, Day 3. Instamart Pune: strip click-through fell from 6.1 to 3.8 percent</a:t>
             </a:r>
           </a:p>
         </p:txBody>
@@ -35263,7 +35263,7 @@
                           </a:solidFill>
                           <a:latin typeface="Calibri"/>
                         </a:rPr>
-                        <a:t>Owned by the faculty session (tentative) and Week 5</a:t>
+                        <a:t>Monday's faculty session on A/B testing (tentative)</a:t>
                       </a:r>
                     </a:p>
                   </a:txBody>
@@ -39349,7 +39349,7 @@
                 </a:solidFill>
                 <a:latin typeface="Calibri"/>
               </a:rPr>
-              <a:t>Week 4 Day 3: what goes with what, beyond chance</a:t>
+              <a:t>Week 4, Day 3. Instamart Pune: strip click-through fell from 6.1 to 3.8 percent</a:t>
             </a:r>
           </a:p>
         </p:txBody>

--- a/content/W04/D3/slides/C2_W04_D03_half1_STUDENT.pptx
+++ b/content/W04/D3/slides/C2_W04_D03_half1_STUDENT.pptx
@@ -3481,7 +3481,12 @@
           </a:p>
           <a:p>
             <a:r>
-              <a:t>watches biscuit, which Monday's faculty session on A/B testing (tentative) took up. Transition: a carry bag.</a:t>
+              <a:t>watches biscuit, the subject of this week's Monday faculty session (tentative) on A/B testing.</a:t>
+            </a:r>
+          </a:p>
+          <a:p>
+            <a:r>
+              <a:t>Transition: a carry bag.</a:t>
             </a:r>
           </a:p>
         </p:txBody>
@@ -6889,8 +6894,8 @@
           <p:nvPr/>
         </p:nvGraphicFramePr>
         <p:xfrm>
-          <a:off x="530352" y="1873504"/>
-          <a:ext cx="11130990" cy="3383280"/>
+          <a:off x="530352" y="1682496"/>
+          <a:ext cx="11130990" cy="3438144"/>
         </p:xfrm>
         <a:graphic>
           <a:graphicData uri="http://schemas.openxmlformats.org/drawingml/2006/table">
@@ -6899,17 +6904,17 @@
                 <a:tableStyleId>{2D5ABB26-0587-4C30-8999-92F81FD0307C}</a:tableStyleId>
               </a:tblPr>
               <a:tblGrid>
-                <a:gridCol w="3198111"/>
-                <a:gridCol w="7932879"/>
+                <a:gridCol w="3530724"/>
+                <a:gridCol w="7600266"/>
               </a:tblGrid>
-              <a:tr h="335280">
+              <a:tr h="310896">
                 <a:tc>
                   <a:txBody>
                     <a:bodyPr/>
                     <a:lstStyle/>
                     <a:p>
                       <a:r>
-                        <a:rPr sz="1250" b="1" i="0">
+                        <a:rPr sz="950" b="1" i="0">
                           <a:solidFill>
                             <a:srgbClr val="FFFFFF"/>
                           </a:solidFill>
@@ -6931,7 +6936,7 @@
                     <a:lstStyle/>
                     <a:p>
                       <a:r>
-                        <a:rPr sz="1250" b="1" i="0">
+                        <a:rPr sz="950" b="1" i="0">
                           <a:solidFill>
                             <a:srgbClr val="FFFFFF"/>
                           </a:solidFill>
@@ -6948,20 +6953,20 @@
                   </a:tcPr>
                 </a:tc>
               </a:tr>
-              <a:tr h="335280">
+              <a:tr h="310896">
                 <a:tc>
                   <a:txBody>
                     <a:bodyPr/>
                     <a:lstStyle/>
                     <a:p>
                       <a:r>
-                        <a:rPr sz="1200" b="0" i="0">
+                        <a:rPr sz="900" b="0" i="0">
                           <a:solidFill>
                             <a:srgbClr val="1A1440"/>
                           </a:solidFill>
                           <a:latin typeface="Calibri"/>
                         </a:rPr>
-                        <a:t>Company, city, surface</a:t>
+                        <a:t>Company, city, part of the app</a:t>
                       </a:r>
                     </a:p>
                   </a:txBody>
@@ -6977,13 +6982,13 @@
                     <a:lstStyle/>
                     <a:p>
                       <a:r>
-                        <a:rPr sz="1200" b="0" i="0">
+                        <a:rPr sz="900" b="0" i="0">
                           <a:solidFill>
                             <a:srgbClr val="1A1440"/>
                           </a:solidFill>
                           <a:latin typeface="Calibri"/>
                         </a:rPr>
-                        <a:t>Swiggy Instamart, Pune: the cart page's strip of three suggested items</a:t>
+                        <a:t>Swiggy Instamart, Pune: the cart page's strip of three suggested items, each in a slot</a:t>
                       </a:r>
                     </a:p>
                   </a:txBody>
@@ -6994,14 +6999,14 @@
                   </a:tcPr>
                 </a:tc>
               </a:tr>
-              <a:tr h="542544">
+              <a:tr h="438912">
                 <a:tc>
                   <a:txBody>
                     <a:bodyPr/>
                     <a:lstStyle/>
                     <a:p>
                       <a:r>
-                        <a:rPr sz="1200" b="0" i="0">
+                        <a:rPr sz="900" b="0" i="0">
                           <a:solidFill>
                             <a:srgbClr val="1A1440"/>
                           </a:solidFill>
@@ -7023,7 +7028,7 @@
                     <a:lstStyle/>
                     <a:p>
                       <a:r>
-                        <a:rPr sz="1200" b="0" i="0">
+                        <a:rPr sz="900" b="0" i="0">
                           <a:solidFill>
                             <a:srgbClr val="1A1440"/>
                           </a:solidFill>
@@ -7040,14 +7045,14 @@
                   </a:tcPr>
                 </a:tc>
               </a:tr>
-              <a:tr h="542544">
+              <a:tr h="438912">
                 <a:tc>
                   <a:txBody>
                     <a:bodyPr/>
                     <a:lstStyle/>
                     <a:p>
                       <a:r>
-                        <a:rPr sz="1200" b="0" i="0">
+                        <a:rPr sz="900" b="0" i="0">
                           <a:solidFill>
                             <a:srgbClr val="1A1440"/>
                           </a:solidFill>
@@ -7069,13 +7074,13 @@
                     <a:lstStyle/>
                     <a:p>
                       <a:r>
-                        <a:rPr sz="1200" b="0" i="0">
+                        <a:rPr sz="900" b="0" i="0">
                           <a:solidFill>
                             <a:srgbClr val="1A1440"/>
                           </a:solidFill>
                           <a:latin typeface="Calibri"/>
                         </a:rPr>
-                        <a:t>Strip click-through (clicks over impressions): 6.1 percent from 17 August to 6 September, 3.8 percent from 7 to 27 September</a:t>
+                        <a:t>Strip click-through, clicks over impressions (an impression is one showing of one slot): 6.1 percent from 17 August to 6 September, 3.8 percent from 7 to 27 September</a:t>
                       </a:r>
                     </a:p>
                   </a:txBody>
@@ -7086,14 +7091,14 @@
                   </a:tcPr>
                 </a:tc>
               </a:tr>
-              <a:tr h="749808">
+              <a:tr h="594360">
                 <a:tc>
                   <a:txBody>
                     <a:bodyPr/>
                     <a:lstStyle/>
                     <a:p>
                       <a:r>
-                        <a:rPr sz="1200" b="0" i="0">
+                        <a:rPr sz="900" b="0" i="0">
                           <a:solidFill>
                             <a:srgbClr val="1A1440"/>
                           </a:solidFill>
@@ -7115,13 +7120,13 @@
                     <a:lstStyle/>
                     <a:p>
                       <a:r>
-                        <a:rPr sz="1200" b="0" i="0">
+                        <a:rPr sz="900" b="0" i="0">
                           <a:solidFill>
                             <a:srgbClr val="1A1440"/>
                           </a:solidFill>
                           <a:latin typeface="Calibri"/>
                         </a:rPr>
-                        <a:t>carts (cart_id, customer_id, placed_date, zone, time_band, cart_value_rs): 40,000 carts, 1 to 28 September, eight zones; cart_items (cart_id, item, quantity, price_rs, margin_rs); strip_log (date, slot, anchor_item, suggested_item, impressions, clicks, adds)</a:t>
+                        <a:t>carts (cart_id, customer_id, placed_date, zone, time_band, cart_value_rs): a sample of 40,000 carts, every September cart of 12,000 customers in eight zones; cart_items (cart_id, item, quantity, price_rs, margin_rs); strip_log (date, slot, anchor_item, the cart item a suggestion sits beside, suggested_item, impressions, clicks, adds, the suggestions put in the cart)</a:t>
                       </a:r>
                     </a:p>
                   </a:txBody>
@@ -7132,14 +7137,14 @@
                   </a:tcPr>
                 </a:tc>
               </a:tr>
-              <a:tr h="335280">
+              <a:tr h="310896">
                 <a:tc>
                   <a:txBody>
                     <a:bodyPr/>
                     <a:lstStyle/>
                     <a:p>
                       <a:r>
-                        <a:rPr sz="1200" b="0" i="0">
+                        <a:rPr sz="900" b="0" i="0">
                           <a:solidFill>
                             <a:srgbClr val="1A1440"/>
                           </a:solidFill>
@@ -7161,7 +7166,7 @@
                     <a:lstStyle/>
                     <a:p>
                       <a:r>
-                        <a:rPr sz="1200" b="0" i="0">
+                        <a:rPr sz="900" b="0" i="0">
                           <a:solidFill>
                             <a:srgbClr val="1A1440"/>
                           </a:solidFill>
@@ -7178,20 +7183,20 @@
                   </a:tcPr>
                 </a:tc>
               </a:tr>
-              <a:tr h="542544">
+              <a:tr h="438912">
                 <a:tc>
                   <a:txBody>
                     <a:bodyPr/>
                     <a:lstStyle/>
                     <a:p>
                       <a:r>
-                        <a:rPr sz="1200" b="0" i="0">
+                        <a:rPr sz="900" b="0" i="0">
                           <a:solidFill>
                             <a:srgbClr val="1A1440"/>
                           </a:solidFill>
                           <a:latin typeface="Calibri"/>
                         </a:rPr>
-                        <a:t>Caveats</a:t>
+                        <a:t>Who asks</a:t>
                       </a:r>
                     </a:p>
                   </a:txBody>
@@ -7207,13 +7212,13 @@
                     <a:lstStyle/>
                     <a:p>
                       <a:r>
-                        <a:rPr sz="1200" b="0" i="0">
+                        <a:rPr sz="900" b="0" i="0">
                           <a:solidFill>
                             <a:srgbClr val="1A1440"/>
                           </a:solidFill>
                           <a:latin typeface="Calibri"/>
                         </a:rPr>
-                        <a:t>Curd ran out in two zones in week three; the top tenth of customers place 38 percent of carts; the strip causes some of the co-occurrence it counts; a cart is one order, a customer places many</a:t>
+                        <a:t>The growth lead, who owns the strip's clicks and orders, and the category manager, who decides which products are promoted; Friday's review is the weekly meeting where both defend their numbers</a:t>
                       </a:r>
                     </a:p>
                   </a:txBody>
@@ -7224,6 +7229,52 @@
                   </a:tcPr>
                 </a:tc>
               </a:tr>
+              <a:tr h="594360">
+                <a:tc>
+                  <a:txBody>
+                    <a:bodyPr/>
+                    <a:lstStyle/>
+                    <a:p>
+                      <a:r>
+                        <a:rPr sz="900" b="0" i="0">
+                          <a:solidFill>
+                            <a:srgbClr val="1A1440"/>
+                          </a:solidFill>
+                          <a:latin typeface="Calibri"/>
+                        </a:rPr>
+                        <a:t>Caveats</a:t>
+                      </a:r>
+                    </a:p>
+                  </a:txBody>
+                  <a:tcPr marL="101600" marR="101600" marT="38100" marB="38100" anchor="ctr">
+                    <a:solidFill>
+                      <a:srgbClr val="FFFFFF"/>
+                    </a:solidFill>
+                  </a:tcPr>
+                </a:tc>
+                <a:tc>
+                  <a:txBody>
+                    <a:bodyPr/>
+                    <a:lstStyle/>
+                    <a:p>
+                      <a:r>
+                        <a:rPr sz="900" b="0" i="0">
+                          <a:solidFill>
+                            <a:srgbClr val="1A1440"/>
+                          </a:solidFill>
+                          <a:latin typeface="Calibri"/>
+                        </a:rPr>
+                        <a:t>Curd ran out in two zones in week three; the top tenth of customers place 38 percent of carts; the strip causes some of the pairs it counts, since a milk add from the strip puts bread and milk in one cart; a cart is one order, a customer places many</a:t>
+                      </a:r>
+                    </a:p>
+                  </a:txBody>
+                  <a:tcPr marL="101600" marR="101600" marT="38100" marB="38100" anchor="ctr">
+                    <a:solidFill>
+                      <a:srgbClr val="FFFFFF"/>
+                    </a:solidFill>
+                  </a:tcPr>
+                </a:tc>
+              </a:tr>
             </a:tbl>
           </a:graphicData>
         </a:graphic>
@@ -7236,8 +7287,8 @@
         </p:nvSpPr>
         <p:spPr>
           <a:xfrm>
-            <a:off x="530352" y="5512816"/>
-            <a:ext cx="11130991" cy="495807"/>
+            <a:off x="530352" y="5376672"/>
+            <a:ext cx="11130991" cy="703072"/>
           </a:xfrm>
           <a:prstGeom prst="rect">
             <a:avLst/>
@@ -7252,17 +7303,17 @@
           <a:p>
             <a:pPr>
               <a:spcAft>
-                <a:spcPts val="800"/>
+                <a:spcPts val="700"/>
               </a:spcAft>
             </a:pPr>
             <a:r>
-              <a:rPr sz="1600" b="0" i="0">
+              <a:rPr sz="1400" b="0" i="0">
                 <a:solidFill>
                   <a:srgbClr val="1A1440"/>
                 </a:solidFill>
                 <a:latin typeface="Calibri"/>
               </a:rPr>
-              <a:t>Illustrative case: the company is real, the situation and the data are synthetic, built for this class.</a:t>
+              <a:t>This page is the ticket, the work request the analyst is handed. Illustrative case: the company is real, the situation and the data are synthetic, built for this class.</a:t>
             </a:r>
           </a:p>
         </p:txBody>
@@ -9865,7 +9916,7 @@
                 </a:solidFill>
                 <a:latin typeface="Calibri"/>
               </a:rPr>
-              <a:t>The plausible wrong answer: "confidence 1.00, so show milk beside bread." Confidence looked only inside the four bread carts. The check: milk is in 8 of 12 carts anyway. The fix: read lift, 1.50, on too few carts to trust.</a:t>
+              <a:t>The plausible wrong answer: "confidence 1.00, so show milk beside bread." Confidence looked only inside the four bread carts. The check: milk is in 8 of 12 carts anyway. The fix: read lift instead, 1.50, though twelve carts are too few to trust it.</a:t>
             </a:r>
           </a:p>
         </p:txBody>
@@ -11369,7 +11420,7 @@
       </p:sp>
       <p:pic>
         <p:nvPicPr>
-          <p:cNvPr id="9" name="mermaid diagram" descr="f1b7f5fb7ba6133e.png"/>
+          <p:cNvPr id="9" name="mermaid diagram" descr="02f701274b331025.png"/>
           <p:cNvPicPr>
             <a:picLocks noChangeAspect="1"/>
           </p:cNvPicPr>
@@ -11420,7 +11471,7 @@
                 </a:solidFill>
                 <a:latin typeface="Calibri"/>
               </a:rPr>
-              <a:t>The concept board "Which pairs beat chance?", finished. Lift joins the week's map as "beyond chance": Thursday asks the same of a cohort against the blend, Friday of a forecast against the baseline. Twelve carts cannot say whether 1.50 is a real pull or four lucky carts.</a:t>
+              <a:t>The concept board "Which pairs beat chance?", finished. Lift joins the week's map as "beyond chance": Thursday asks the same of one group of members against the city's single number, and Friday of a forecast against a simple rule. Twelve carts cannot say whether 1.50 is a real pull or four lucky carts.</a:t>
             </a:r>
           </a:p>
         </p:txBody>
@@ -16572,7 +16623,7 @@
         <p:spPr>
           <a:xfrm>
             <a:off x="530352" y="3840988"/>
-            <a:ext cx="11130991" cy="772160"/>
+            <a:ext cx="11130991" cy="1048512"/>
           </a:xfrm>
           <a:prstGeom prst="rect">
             <a:avLst/>
@@ -16597,7 +16648,7 @@
                 </a:solidFill>
                 <a:latin typeface="Calibri"/>
               </a:rPr>
-              <a:t>A cart becomes a set of items; every pair inside it adds one to its tally; lift is carts with both, times all carts, over the two items' own counts. The same three counts as the cards, with n = 40,000.</a:t>
+              <a:t>A cart becomes a set of items, and every pair inside it adds one to its tally. The last line is the cards' seen over expected, rearranged: on the twelve carts, 4 / (12 x 4/12 x 8/12) is the same as 4 x 12 / (4 x 8), which is 1.50. Here n is 40,000.</a:t>
             </a:r>
           </a:p>
         </p:txBody>
@@ -17117,7 +17168,7 @@
       </p:sp>
       <p:pic>
         <p:nvPicPr>
-          <p:cNvPr id="9" name="mermaid diagram" descr="277b60f8a026987b.png"/>
+          <p:cNvPr id="9" name="mermaid diagram" descr="31a894d7143eca7e.png"/>
           <p:cNvPicPr>
             <a:picLocks noChangeAspect="1"/>
           </p:cNvPicPr>
@@ -17668,8 +17719,8 @@
         </p:blipFill>
         <p:spPr>
           <a:xfrm>
-            <a:off x="2104189" y="1664208"/>
-            <a:ext cx="7983316" cy="3319272"/>
+            <a:off x="2173256" y="1664208"/>
+            <a:ext cx="7845182" cy="3319272"/>
           </a:xfrm>
           <a:prstGeom prst="rect">
             <a:avLst/>
@@ -17740,7 +17791,7 @@
                 </a:solidFill>
                 <a:latin typeface="Calibri"/>
               </a:rPr>
-              <a:t>On twelve carts lift read 1.50 because all four bread carts happened to hold milk. On 40,000 carts bread to milk reads confidence 0.74 and lift 1.04: milk sits beside bread about as often as it sits in any cart. Chance gives 0.34 x 0.71 = 0.241 of carts holding both; 0.252 do.</a:t>
+              <a:t>On twelve carts lift read 1.50 because all four bread carts happened to hold milk. On 40,000 carts bread to milk reads confidence 0.74: chance gives 0.34 x 0.71 x 40,000 = 9,656 carts holding both, 10,064 do, and 10,064 / 9,656 = 1.04. A few carts can make a pull look strong; the full count shows milk beside bread about as often as in any cart.</a:t>
             </a:r>
           </a:p>
         </p:txBody>
@@ -19733,7 +19784,7 @@
                 </a:solidFill>
                 <a:latin typeface="Calibri"/>
               </a:rPr>
-              <a:t>Confidence toward milk and lift with milk for the twelve most common items</a:t>
+              <a:t>Confidence toward milk and lift with milk for the nine most common items</a:t>
             </a:r>
           </a:p>
         </p:txBody>
@@ -20294,7 +20345,7 @@
         <p:spPr>
           <a:xfrm>
             <a:off x="530352" y="1956816"/>
-            <a:ext cx="11130991" cy="1341120"/>
+            <a:ext cx="11130991" cy="1874519"/>
           </a:xfrm>
           <a:prstGeom prst="roundRect">
             <a:avLst>
@@ -20342,7 +20393,7 @@
         <p:spPr>
           <a:xfrm>
             <a:off x="676656" y="2084832"/>
-            <a:ext cx="45720" cy="1085088"/>
+            <a:ext cx="45720" cy="1618487"/>
           </a:xfrm>
           <a:prstGeom prst="roundRect">
             <a:avLst>
@@ -20388,7 +20439,7 @@
         <p:spPr>
           <a:xfrm>
             <a:off x="877824" y="2075688"/>
-            <a:ext cx="10564063" cy="1158240"/>
+            <a:ext cx="10564063" cy="1691639"/>
           </a:xfrm>
           <a:prstGeom prst="rect">
             <a:avLst/>
@@ -20417,7 +20468,7 @@
                 </a:solidFill>
                 <a:latin typeface="Calibri"/>
               </a:rPr>
-              <a:t>Its recommender team wrote that counting how often buyers of A also bought B would have made a bestseller such as Harry Potter the top recommendation beside everything. The fix compared what was seen with what chance would predict, which is lift in spirit. Years later the team measured the base rate per purchase, because heavy buyers inflate every count (Amazon Science, checked 12 October 2026).</a:t>
+              <a:t>Amazon Science's history of the company's recommendation algorithm says that counting how often buyers of one item bought another would make a few bestsellers, such as Harry Potter books and trash bags, the top recommendations for every customer. The fix compared what was seen with what chance would predict, which is lift in spirit. Later the team measured the base rate, how likely an item is anyway, with any given purchase, scaling heavy buyers down, because they inflate every count (Amazon Science, checked 12 October 2026).</a:t>
             </a:r>
           </a:p>
         </p:txBody>
@@ -20430,7 +20481,7 @@
         </p:nvSpPr>
         <p:spPr>
           <a:xfrm>
-            <a:off x="530352" y="3462528"/>
+            <a:off x="530352" y="3995927"/>
             <a:ext cx="11130991" cy="495807"/>
           </a:xfrm>
           <a:prstGeom prst="rect">
@@ -21460,7 +21511,7 @@
                           </a:solidFill>
                           <a:latin typeface="Calibri"/>
                         </a:rPr>
-                        <a:t>ice cream, chocolate sauce</a:t>
+                        <a:t>chocolate sauce, ice cream</a:t>
                       </a:r>
                     </a:p>
                   </a:txBody>
@@ -21504,7 +21555,7 @@
                           </a:solidFill>
                           <a:latin typeface="Calibri"/>
                         </a:rPr>
-                        <a:t>0.06</a:t>
+                        <a:t>0.18</a:t>
                       </a:r>
                     </a:p>
                   </a:txBody>
@@ -21526,7 +21577,7 @@
                           </a:solidFill>
                           <a:latin typeface="Calibri"/>
                         </a:rPr>
-                        <a:t>0.18</a:t>
+                        <a:t>0.06</a:t>
                       </a:r>
                     </a:p>
                   </a:txBody>
@@ -21572,7 +21623,7 @@
         <p:spPr>
           <a:xfrm>
             <a:off x="530352" y="3889248"/>
-            <a:ext cx="11130991" cy="772160"/>
+            <a:ext cx="11130991" cy="1048512"/>
           </a:xfrm>
           <a:prstGeom prst="rect">
             <a:avLst/>
@@ -21597,7 +21648,7 @@
                 </a:solidFill>
                 <a:latin typeface="Calibri"/>
               </a:rPr>
-              <a:t>The second route: lift is also confidence over the partner's share. Bread to milk 0.74 / 0.71 = 1.04, and milk to bread 0.35 / 0.34 = 1.04. Both routes agree and lift reads the same from either side.</a:t>
+              <a:t>Support is a share of all carts, written as a percent; confidence is a share of A's carts, written as a decimal. The second route: lift is also confidence over the partner's share. Bread to milk 0.74 / 0.71 = 1.04, and milk to bread 0.354 / 0.34 = 1.04.</a:t>
             </a:r>
           </a:p>
         </p:txBody>
@@ -23624,7 +23675,7 @@
                 </a:solidFill>
                 <a:latin typeface="Calibri"/>
               </a:rPr>
-              <a:t>Milk took half the slot impressions at 1.2 percent; everything else clicked at 6.4, up from 6.2. Half of 1.2 plus half of 6.4 is 3.8. The plausible wrong answer, "shoppers changed after the monsoon", fails the split by suggested item.</a:t>
+              <a:t>Milk took half the slot impressions at 1.2 percent; everything else clicked at 6.4, up from 6.2 before the change, when milk held 2 percent of them. Half of 1.2 plus half of 6.4 is 3.8. The plausible wrong answer, "shoppers changed after the monsoon", fails the split by suggested item.</a:t>
             </a:r>
           </a:p>
         </p:txBody>
@@ -26637,7 +26688,7 @@
         <p:spPr>
           <a:xfrm>
             <a:off x="530352" y="1956816"/>
-            <a:ext cx="3588410" cy="2385568"/>
+            <a:ext cx="3588410" cy="2344420"/>
           </a:xfrm>
           <a:prstGeom prst="roundRect">
             <a:avLst>
@@ -26794,7 +26845,7 @@
         <p:spPr>
           <a:xfrm>
             <a:off x="731519" y="2962656"/>
-            <a:ext cx="3186074" cy="498856"/>
+            <a:ext cx="3186074" cy="267716"/>
           </a:xfrm>
           <a:prstGeom prst="rect">
             <a:avLst/>
@@ -26815,7 +26866,7 @@
                 </a:solidFill>
                 <a:latin typeface="Calibri"/>
               </a:rPr>
-              <a:t>Three pairs above a 1 percent floor</a:t>
+              <a:t>Three pairs above a floor</a:t>
             </a:r>
           </a:p>
         </p:txBody>
@@ -26828,8 +26879,8 @@
         </p:nvSpPr>
         <p:spPr>
           <a:xfrm>
-            <a:off x="731519" y="3534664"/>
-            <a:ext cx="3186074" cy="581406"/>
+            <a:off x="731519" y="3303524"/>
+            <a:ext cx="3186074" cy="763016"/>
           </a:xfrm>
           <a:prstGeom prst="rect">
             <a:avLst/>
@@ -26850,7 +26901,7 @@
                 </a:solidFill>
                 <a:latin typeface="Calibri"/>
               </a:rPr>
-              <a:t>Chips and cold drink 3.39, coriander and green chillies 3.00, bread and butter 2.21. Milk takes no slot.</a:t>
+              <a:t>Lift 3.39 for chips and cold drink, 3.00 for coriander and green chillies, 2.21 for bread and butter, each in at least 1 percent of carts, the floor. Milk takes no slot.</a:t>
             </a:r>
           </a:p>
         </p:txBody>
@@ -26864,7 +26915,7 @@
         <p:spPr>
           <a:xfrm>
             <a:off x="4301642" y="1956816"/>
-            <a:ext cx="3588410" cy="2385568"/>
+            <a:ext cx="3588410" cy="2344420"/>
           </a:xfrm>
           <a:prstGeom prst="roundRect">
             <a:avLst>
@@ -27091,7 +27142,7 @@
         <p:spPr>
           <a:xfrm>
             <a:off x="8072932" y="1956816"/>
-            <a:ext cx="3588410" cy="2385568"/>
+            <a:ext cx="3588410" cy="2344420"/>
           </a:xfrm>
           <a:prstGeom prst="roundRect">
             <a:avLst>
@@ -27960,7 +28011,7 @@
                 </a:solidFill>
                 <a:latin typeface="Calibri"/>
               </a:rPr>
-              <a:t>The growth lead, who takes a ranked list and a rupee figure to Friday's review, where the category manager will argue that milk anchors the cart.</a:t>
+              <a:t>The growth lead, who takes a ranked list and a rupee figure to Friday's review, where the category manager will argue that milk, the top seller, belongs in every slot.</a:t>
             </a:r>
           </a:p>
         </p:txBody>
@@ -30771,8 +30822,8 @@
         </p:blipFill>
         <p:spPr>
           <a:xfrm>
-            <a:off x="1536619" y="1664208"/>
-            <a:ext cx="9118456" cy="3561080"/>
+            <a:off x="1713524" y="1664208"/>
+            <a:ext cx="8764645" cy="3422904"/>
           </a:xfrm>
           <a:prstGeom prst="rect">
             <a:avLst/>
@@ -30787,7 +30838,7 @@
         </p:nvSpPr>
         <p:spPr>
           <a:xfrm>
-            <a:off x="530352" y="5261864"/>
+            <a:off x="530352" y="5123688"/>
             <a:ext cx="11130991" cy="316992"/>
           </a:xfrm>
           <a:prstGeom prst="rect">
@@ -30822,28 +30873,28 @@
         </p:nvSpPr>
         <p:spPr>
           <a:xfrm>
-            <a:off x="530352" y="5588000"/>
-            <a:ext cx="11130991" cy="611631"/>
-          </a:xfrm>
-          <a:prstGeom prst="rect">
-            <a:avLst/>
-          </a:prstGeom>
-          <a:noFill/>
-        </p:spPr>
-        <p:txBody>
-          <a:bodyPr wrap="square" anchor="t" lIns="0" rIns="0" tIns="0" bIns="0">
-            <a:spAutoFit/>
-          </a:bodyPr>
-          <a:lstStyle/>
-          <a:p>
-            <a:r>
-              <a:rPr sz="1400" b="0" i="0">
+            <a:off x="530352" y="5449824"/>
+            <a:ext cx="11130991" cy="749808"/>
+          </a:xfrm>
+          <a:prstGeom prst="rect">
+            <a:avLst/>
+          </a:prstGeom>
+          <a:noFill/>
+        </p:spPr>
+        <p:txBody>
+          <a:bodyPr wrap="square" anchor="t" lIns="0" rIns="0" tIns="0" bIns="0">
+            <a:spAutoFit/>
+          </a:bodyPr>
+          <a:lstStyle/>
+          <a:p>
+            <a:r>
+              <a:rPr sz="1200" b="0" i="0">
                 <a:solidFill>
                   <a:srgbClr val="1A1440"/>
                 </a:solidFill>
                 <a:latin typeface="Calibri"/>
               </a:rPr>
-              <a:t>Above a floor of 1 percent of carts (400 carts), 246 pairs qualify and four beat chance clearly: chips and cold drink 3.39, coriander and green chillies 3.00, bread and butter 2.21, onions and tomatoes 1.70. The fifth reads 1.09.</a:t>
+              <a:t>Above a floor of 1 percent of carts (400 carts), 246 pairs qualify and four reach lift 1.5 or more: chips and cold drink 3.39, coriander and green chillies 3.00, bread and butter 2.21, onions and tomatoes 1.70. The fifth reads 1.09. The strip has three slots, so onions and tomatoes waits as the first replacement. Each step right on the picture is ten times more carts.</a:t>
             </a:r>
           </a:p>
         </p:txBody>
@@ -31370,7 +31421,7 @@
         <p:spPr>
           <a:xfrm>
             <a:off x="530352" y="1956816"/>
-            <a:ext cx="11130991" cy="1324864"/>
+            <a:ext cx="11130991" cy="1877568"/>
           </a:xfrm>
           <a:prstGeom prst="rect">
             <a:avLst/>
@@ -31395,7 +31446,7 @@
                 </a:solidFill>
                 <a:latin typeface="Calibri"/>
               </a:rPr>
-              <a:t>Ice cream and chocolate sauce read lift 4.60, the strongest pair between 0.2 and 1 percent support, on 100 carts in four weeks of this sample. A slot is shown on every cart page, so a pair that thin cannot repay it. It goes on a watch list: tried in two zones for two weeks and promoted only if its click-through beats the slot's own record. Acting on lift alone is the trap a floor exists to stop.</a:t>
+              <a:t>Ice cream and chocolate sauce read lift 4.60, the strongest pair between 0.2 percent (80 carts, too few even to trial below it) and the 1 percent floor. The pair is real, 100 carts where chance gives 22, but the strip suggests it only beside ice cream, in 1,600 carts over four weeks, so a rule for it earns little. It goes on a watch list: for two weeks in two zones, a random half of shoppers see it, and it takes the slot on ice-cream carts only if it beats the next-best suggestion there. Acting on lift alone is the trap a floor exists to stop.</a:t>
             </a:r>
           </a:p>
         </p:txBody>
@@ -33350,8 +33401,8 @@
         </p:blipFill>
         <p:spPr>
           <a:xfrm>
-            <a:off x="1088110" y="1664208"/>
-            <a:ext cx="10015474" cy="3215640"/>
+            <a:off x="1679861" y="1664208"/>
+            <a:ext cx="8831971" cy="2835656"/>
           </a:xfrm>
           <a:prstGeom prst="rect">
             <a:avLst/>
@@ -33366,7 +33417,7 @@
         </p:nvSpPr>
         <p:spPr>
           <a:xfrm>
-            <a:off x="530352" y="4916424"/>
+            <a:off x="530352" y="4536440"/>
             <a:ext cx="11130991" cy="316992"/>
           </a:xfrm>
           <a:prstGeom prst="rect">
@@ -33401,28 +33452,28 @@
         </p:nvSpPr>
         <p:spPr>
           <a:xfrm>
-            <a:off x="530352" y="5242560"/>
-            <a:ext cx="11130991" cy="957072"/>
-          </a:xfrm>
-          <a:prstGeom prst="rect">
-            <a:avLst/>
-          </a:prstGeom>
-          <a:noFill/>
-        </p:spPr>
-        <p:txBody>
-          <a:bodyPr wrap="square" anchor="t" lIns="0" rIns="0" tIns="0" bIns="0">
-            <a:spAutoFit/>
-          </a:bodyPr>
-          <a:lstStyle/>
-          <a:p>
-            <a:r>
-              <a:rPr sz="1600" b="0" i="0">
+            <a:off x="530352" y="4862576"/>
+            <a:ext cx="11130991" cy="1337056"/>
+          </a:xfrm>
+          <a:prstGeom prst="rect">
+            <a:avLst/>
+          </a:prstGeom>
+          <a:noFill/>
+        </p:spPr>
+        <p:txBody>
+          <a:bodyPr wrap="square" anchor="t" lIns="0" rIns="0" tIns="0" bIns="0">
+            <a:spAutoFit/>
+          </a:bodyPr>
+          <a:lstStyle/>
+          <a:p>
+            <a:r>
+              <a:rPr sz="1400" b="0" i="0">
                 <a:solidFill>
                   <a:srgbClr val="1A1440"/>
                 </a:solidFill>
                 <a:latin typeface="Calibri"/>
               </a:rPr>
-              <a:t>60,000 views a day (strip_log) x click-through x 0.5 adds per click (range 0.4 to 0.6) x Rs 9 margin an add (range Rs 7 to 11). Milk's half of three slots is 1.5 slots' worth: Rs 4.2 lakh x 1.5 = Rs 6.3 lakh a month, from Rs 3.9 lakh to Rs 9.3 lakh across the ranges.</a:t>
+              <a:t>Margin is what Instamart keeps from a sale after the item's cost: bread sells for Rs 45 and keeps Rs 6.70. A slot's day is 60,000 views (strip_log) x click-through x 0.5 adds per click (strip_log, range 0.4 to 0.6) x Rs 9 margin an add (the average cart_items line, range Rs 7 to Rs 11), with the promoted pairs assumed to click at the 6.4 percent the rest drew. Milk holds 1.5 slots' worth: Rs 4.2 lakh x 1.5 = Rs 6.3 lakh a month, Rs 3.9 lakh at 0.4 x Rs 7 and Rs 9.3 lakh at 0.6 x Rs 11.</a:t>
             </a:r>
           </a:p>
         </p:txBody>
@@ -33949,7 +34000,7 @@
         <p:spPr>
           <a:xfrm>
             <a:off x="530352" y="1956816"/>
-            <a:ext cx="11130991" cy="1601216"/>
+            <a:ext cx="11130991" cy="1877568"/>
           </a:xfrm>
           <a:prstGeom prst="rect">
             <a:avLst/>
@@ -33974,7 +34025,7 @@
                 </a:solidFill>
                 <a:latin typeface="Calibri"/>
               </a:rPr>
-              <a:t>The plausible wrong answer books sales: a slot at 6.4 percent makes 1,920 adds a day, each selling for about Rs 42, so Rs 80,197 a day of "strip revenue". The growth lead keeps the margin, Rs 17,280. If the strip ever adds a bundle discount, the discount is margin handed back for adds that might have happened anyway. Swiggy's own letter describes its Maxxsaver discount as margin returned to the user, the cost line a rupee case must carry (W4, checked 12 October 2026).</a:t>
+              <a:t>The plausible wrong answer books sales: a slot at 6.4 percent makes 1,920 adds a day, each selling for about Rs 41.77, so Rs 80,197 a day of "strip revenue". The growth lead keeps the margin, Rs 17,280. If the strip ever adds a bundle discount, the discount is margin handed back for adds that might have happened anyway. Swiggy's shareholder letter for April to June 2025 describes Maxxsaver, a discount unlocked once a basket passes a set size, as margin returned to the user: the cost line a rupee case must carry (checked 12 October 2026).</a:t>
             </a:r>
           </a:p>
         </p:txBody>
@@ -34501,8 +34552,8 @@
           <p:nvPr/>
         </p:nvGraphicFramePr>
         <p:xfrm>
-          <a:off x="530352" y="1921256"/>
-          <a:ext cx="11130989" cy="4039616"/>
+          <a:off x="530352" y="1808988"/>
+          <a:ext cx="11130989" cy="4264152"/>
         </p:xfrm>
         <a:graphic>
           <a:graphicData uri="http://schemas.openxmlformats.org/drawingml/2006/table">
@@ -34511,18 +34562,18 @@
                 <a:tableStyleId>{2D5ABB26-0587-4C30-8999-92F81FD0307C}</a:tableStyleId>
               </a:tblPr>
               <a:tblGrid>
-                <a:gridCol w="2745206"/>
-                <a:gridCol w="3095080"/>
-                <a:gridCol w="5290703"/>
+                <a:gridCol w="2733835"/>
+                <a:gridCol w="4198577"/>
+                <a:gridCol w="4198577"/>
               </a:tblGrid>
-              <a:tr h="369824">
+              <a:tr h="352552">
                 <a:tc>
                   <a:txBody>
                     <a:bodyPr/>
                     <a:lstStyle/>
                     <a:p>
                       <a:r>
-                        <a:rPr sz="1450" b="1" i="0">
+                        <a:rPr sz="1350" b="1" i="0">
                           <a:solidFill>
                             <a:srgbClr val="FFFFFF"/>
                           </a:solidFill>
@@ -34544,7 +34595,7 @@
                     <a:lstStyle/>
                     <a:p>
                       <a:r>
-                        <a:rPr sz="1450" b="1" i="0">
+                        <a:rPr sz="1350" b="1" i="0">
                           <a:solidFill>
                             <a:srgbClr val="FFFFFF"/>
                           </a:solidFill>
@@ -34566,7 +34617,7 @@
                     <a:lstStyle/>
                     <a:p>
                       <a:r>
-                        <a:rPr sz="1450" b="1" i="0">
+                        <a:rPr sz="1350" b="1" i="0">
                           <a:solidFill>
                             <a:srgbClr val="FFFFFF"/>
                           </a:solidFill>
@@ -34583,14 +34634,14 @@
                   </a:tcPr>
                 </a:tc>
               </a:tr>
-              <a:tr h="611632">
+              <a:tr h="577088">
                 <a:tc>
                   <a:txBody>
                     <a:bodyPr/>
                     <a:lstStyle/>
                     <a:p>
                       <a:r>
-                        <a:rPr sz="1400" b="0" i="0">
+                        <a:rPr sz="1300" b="0" i="0">
                           <a:solidFill>
                             <a:srgbClr val="1A1440"/>
                           </a:solidFill>
@@ -34612,13 +34663,13 @@
                     <a:lstStyle/>
                     <a:p>
                       <a:r>
-                        <a:rPr sz="1400" b="0" i="0">
+                        <a:rPr sz="1300" b="0" i="0">
                           <a:solidFill>
                             <a:srgbClr val="1A1440"/>
                           </a:solidFill>
                           <a:latin typeface="Calibri"/>
                         </a:rPr>
-                        <a:t>A holdout that changes the strip</a:t>
+                        <a:t>A holdout: a share of shoppers kept on the old strip, compared with the rest</a:t>
                       </a:r>
                     </a:p>
                   </a:txBody>
@@ -34634,13 +34685,13 @@
                     <a:lstStyle/>
                     <a:p>
                       <a:r>
-                        <a:rPr sz="1400" b="0" i="0">
+                        <a:rPr sz="1300" b="0" i="0">
                           <a:solidFill>
                             <a:srgbClr val="1A1440"/>
                           </a:solidFill>
                           <a:latin typeface="Calibri"/>
                         </a:rPr>
-                        <a:t>Monday's faculty session on A/B testing (tentative)</a:t>
+                        <a:t>This week's Monday faculty session on A/B testing (tentative)</a:t>
                       </a:r>
                     </a:p>
                   </a:txBody>
@@ -34651,20 +34702,20 @@
                   </a:tcPr>
                 </a:tc>
               </a:tr>
-              <a:tr h="611632">
+              <a:tr h="577088">
                 <a:tc>
                   <a:txBody>
                     <a:bodyPr/>
                     <a:lstStyle/>
                     <a:p>
                       <a:r>
-                        <a:rPr sz="1400" b="0" i="0">
+                        <a:rPr sz="1300" b="0" i="0">
                           <a:solidFill>
                             <a:srgbClr val="1A1440"/>
                           </a:solidFill>
                           <a:latin typeface="Calibri"/>
                         </a:rPr>
-                        <a:t>Heavy buyers</a:t>
+                        <a:t>Heavy buyers, each placing many carts</a:t>
                       </a:r>
                     </a:p>
                   </a:txBody>
@@ -34680,7 +34731,7 @@
                     <a:lstStyle/>
                     <a:p>
                       <a:r>
-                        <a:rPr sz="1400" b="0" i="0">
+                        <a:rPr sz="1300" b="0" i="0">
                           <a:solidFill>
                             <a:srgbClr val="1A1440"/>
                           </a:solidFill>
@@ -34702,7 +34753,7 @@
                     <a:lstStyle/>
                     <a:p>
                       <a:r>
-                        <a:rPr sz="1400" b="0" i="0">
+                        <a:rPr sz="1300" b="0" i="0">
                           <a:solidFill>
                             <a:srgbClr val="1A1440"/>
                           </a:solidFill>
@@ -34719,14 +34770,14 @@
                   </a:tcPr>
                 </a:tc>
               </a:tr>
-              <a:tr h="611632">
+              <a:tr h="577088">
                 <a:tc>
                   <a:txBody>
                     <a:bodyPr/>
                     <a:lstStyle/>
                     <a:p>
                       <a:r>
-                        <a:rPr sz="1400" b="0" i="0">
+                        <a:rPr sz="1300" b="0" i="0">
                           <a:solidFill>
                             <a:srgbClr val="1A1440"/>
                           </a:solidFill>
@@ -34748,7 +34799,7 @@
                     <a:lstStyle/>
                     <a:p>
                       <a:r>
-                        <a:rPr sz="1400" b="0" i="0">
+                        <a:rPr sz="1300" b="0" i="0">
                           <a:solidFill>
                             <a:srgbClr val="1A1440"/>
                           </a:solidFill>
@@ -34770,7 +34821,7 @@
                     <a:lstStyle/>
                     <a:p>
                       <a:r>
-                        <a:rPr sz="1400" b="0" i="0">
+                        <a:rPr sz="1300" b="0" i="0">
                           <a:solidFill>
                             <a:srgbClr val="1A1440"/>
                           </a:solidFill>
@@ -34787,14 +34838,14 @@
                   </a:tcPr>
                 </a:tc>
               </a:tr>
-              <a:tr h="611632">
+              <a:tr h="801624">
                 <a:tc>
                   <a:txBody>
                     <a:bodyPr/>
                     <a:lstStyle/>
                     <a:p>
                       <a:r>
-                        <a:rPr sz="1400" b="0" i="0">
+                        <a:rPr sz="1300" b="0" i="0">
                           <a:solidFill>
                             <a:srgbClr val="1A1440"/>
                           </a:solidFill>
@@ -34816,13 +34867,13 @@
                     <a:lstStyle/>
                     <a:p>
                       <a:r>
-                        <a:rPr sz="1400" b="0" i="0">
+                        <a:rPr sz="1300" b="0" i="0">
                           <a:solidFill>
                             <a:srgbClr val="1A1440"/>
                           </a:solidFill>
                           <a:latin typeface="Calibri"/>
                         </a:rPr>
-                        <a:t>Morning carts only</a:t>
+                        <a:t>Each time band alone</a:t>
                       </a:r>
                     </a:p>
                   </a:txBody>
@@ -34838,13 +34889,13 @@
                     <a:lstStyle/>
                     <a:p>
                       <a:r>
-                        <a:rPr sz="1400" b="0" i="0">
+                        <a:rPr sz="1300" b="0" i="0">
                           <a:solidFill>
                             <a:srgbClr val="1A1440"/>
                           </a:solidFill>
                           <a:latin typeface="Calibri"/>
                         </a:rPr>
-                        <a:t>Morning carts hold milk 80 percent of the time; bread with milk still about 1.04</a:t>
+                        <a:t>Morning carts hold milk 80 percent of the time; bread with milk reads 1.03 to 1.05 in every band</a:t>
                       </a:r>
                     </a:p>
                   </a:txBody>
@@ -34855,20 +34906,20 @@
                   </a:tcPr>
                 </a:tc>
               </a:tr>
-              <a:tr h="611632">
+              <a:tr h="801624">
                 <a:tc>
                   <a:txBody>
                     <a:bodyPr/>
                     <a:lstStyle/>
                     <a:p>
                       <a:r>
-                        <a:rPr sz="1400" b="0" i="0">
+                        <a:rPr sz="1300" b="0" i="0">
                           <a:solidFill>
                             <a:srgbClr val="1A1440"/>
                           </a:solidFill>
                           <a:latin typeface="Calibri"/>
                         </a:rPr>
-                        <a:t>The strip's own pull</a:t>
+                        <a:t>Position in the strip</a:t>
                       </a:r>
                     </a:p>
                   </a:txBody>
@@ -34884,7 +34935,7 @@
                     <a:lstStyle/>
                     <a:p>
                       <a:r>
-                        <a:rPr sz="1400" b="0" i="0">
+                        <a:rPr sz="1300" b="0" i="0">
                           <a:solidFill>
                             <a:srgbClr val="1A1440"/>
                           </a:solidFill>
@@ -34906,13 +34957,13 @@
                     <a:lstStyle/>
                     <a:p>
                       <a:r>
-                        <a:rPr sz="1400" b="0" i="0">
+                        <a:rPr sz="1300" b="0" i="0">
                           <a:solidFill>
                             <a:srgbClr val="1A1440"/>
                           </a:solidFill>
                           <a:latin typeface="Calibri"/>
                         </a:rPr>
-                        <a:t>Slot 1 draws 8.2 percent, slot 3 5.4; milk is low in all three</a:t>
+                        <a:t>Among suggestions other than milk, slot 1 draws 8.2 percent and slot 3 5.4; milk is low in all three</a:t>
                       </a:r>
                     </a:p>
                   </a:txBody>
@@ -34923,20 +34974,20 @@
                   </a:tcPr>
                 </a:tc>
               </a:tr>
-              <a:tr h="611632">
+              <a:tr h="577088">
                 <a:tc>
                   <a:txBody>
                     <a:bodyPr/>
                     <a:lstStyle/>
                     <a:p>
                       <a:r>
-                        <a:rPr sz="1400" b="0" i="0">
+                        <a:rPr sz="1300" b="0" i="0">
                           <a:solidFill>
                             <a:srgbClr val="1A1440"/>
                           </a:solidFill>
                           <a:latin typeface="Calibri"/>
                         </a:rPr>
-                        <a:t>Per cart against per customer</a:t>
+                        <a:t>The strip feeds its own counts</a:t>
                       </a:r>
                     </a:p>
                   </a:txBody>
@@ -34952,13 +35003,13 @@
                     <a:lstStyle/>
                     <a:p>
                       <a:r>
-                        <a:rPr sz="1400" b="0" i="0">
+                        <a:rPr sz="1300" b="0" i="0">
                           <a:solidFill>
                             <a:srgbClr val="1A1440"/>
                           </a:solidFill>
                           <a:latin typeface="Calibri"/>
                         </a:rPr>
-                        <a:t>The heavy-buyer check</a:t>
+                        <a:t>The holdout's shoppers, who never see the strip</a:t>
                       </a:r>
                     </a:p>
                   </a:txBody>
@@ -34974,13 +35025,13 @@
                     <a:lstStyle/>
                     <a:p>
                       <a:r>
-                        <a:rPr sz="1400" b="0" i="0">
+                        <a:rPr sz="1300" b="0" i="0">
                           <a:solidFill>
                             <a:srgbClr val="1A1440"/>
                           </a:solidFill>
                           <a:latin typeface="Calibri"/>
                         </a:rPr>
-                        <a:t>Answered above</a:t>
+                        <a:t>Not in this data; the holdout in the first row settles it</a:t>
                       </a:r>
                     </a:p>
                   </a:txBody>
@@ -35524,8 +35575,8 @@
         </p:blipFill>
         <p:spPr>
           <a:xfrm>
-            <a:off x="1080357" y="1664208"/>
-            <a:ext cx="10030979" cy="2939288"/>
+            <a:off x="1551914" y="1664208"/>
+            <a:ext cx="9087866" cy="2662936"/>
           </a:xfrm>
           <a:prstGeom prst="rect">
             <a:avLst/>
@@ -35540,7 +35591,7 @@
         </p:nvSpPr>
         <p:spPr>
           <a:xfrm>
-            <a:off x="530352" y="4640072"/>
+            <a:off x="530352" y="4363720"/>
             <a:ext cx="11130991" cy="316992"/>
           </a:xfrm>
           <a:prstGeom prst="rect">
@@ -35575,8 +35626,8 @@
         </p:nvSpPr>
         <p:spPr>
           <a:xfrm>
-            <a:off x="530352" y="4966208"/>
-            <a:ext cx="11130991" cy="1233424"/>
+            <a:off x="530352" y="4689856"/>
+            <a:ext cx="11130991" cy="1509775"/>
           </a:xfrm>
           <a:prstGeom prst="rect">
             <a:avLst/>
@@ -35596,7 +35647,7 @@
                 </a:solidFill>
                 <a:latin typeface="Calibri"/>
               </a:rPr>
-              <a:t>The top tenth of customers place 38 percent of the carts and 73 percent of the carts holding both chips and a cold drink. Counted with every customer once, the pair's lift falls from 3.39 to 2.56 and still beats chance; bread and milk stays at 1.04. The pair keeps its slot, and the growth lead says the smaller number.</a:t>
+              <a:t>The top tenth of customers place 38 percent of the carts and 73 percent of the carts holding both chips and a cold drink. Counting every customer once gives each cart a weight of one over its customer's number of carts, so a shopper with 4 carts counts each as 0.25. Counted that way, the pair's lift falls from 3.39 to 2.56 and still beats chance; bread and milk stays at 1.04. The pair keeps its slot, and the growth lead says the smaller number.</a:t>
             </a:r>
           </a:p>
         </p:txBody>
@@ -36202,7 +36253,7 @@
                 </a:solidFill>
                 <a:latin typeface="Calibri"/>
               </a:rPr>
-              <a:t>In Hadapsar and Viman Nagar from 15 to 21 September, curd is in 12 of 2,583 carts. Set those aside and curd's share rises from 26.0 to 27.8 percent; its lift with milk stays 1.01. A stock-out cuts the count, never the pull.</a:t>
+              <a:t>In Hadapsar and Viman Nagar from 15 to 21 September, curd is in 12 of 2,583 carts. Set those 2,583 carts aside and curd's share rises from 26.0 to 27.8 percent; its lift with milk stays 1.01. A stock-out cuts the count, never the pull.</a:t>
             </a:r>
           </a:p>
         </p:txBody>
@@ -36729,7 +36780,7 @@
         <p:spPr>
           <a:xfrm>
             <a:off x="731519" y="3520440"/>
-            <a:ext cx="9509760" cy="284226"/>
+            <a:ext cx="9509760" cy="531876"/>
           </a:xfrm>
           <a:prstGeom prst="rect">
             <a:avLst/>
@@ -36750,7 +36801,7 @@
                 </a:solidFill>
                 <a:latin typeface="Calibri"/>
               </a:rPr>
-              <a:t>Which items go together on twelve real carts, counted three ways by hand before any code opens?</a:t>
+              <a:t>Which items go together on twelve carts from the case, counted three ways by hand before any code opens?</a:t>
             </a:r>
           </a:p>
         </p:txBody>
@@ -37264,7 +37315,7 @@
         <p:spPr>
           <a:xfrm>
             <a:off x="530352" y="3649091"/>
-            <a:ext cx="11130991" cy="772160"/>
+            <a:ext cx="11130991" cy="1048512"/>
           </a:xfrm>
           <a:prstGeom prst="rect">
             <a:avLst/>
@@ -37289,7 +37340,7 @@
                 </a:solidFill>
                 <a:latin typeface="Calibri"/>
               </a:rPr>
-              <a:t>After lunch each group re-ranks the strip, prices its three slots and answers the category manager, who will say that milk anchors the cart.</a:t>
+              <a:t>After lunch each group re-ranks the strip, prices its three slots and answers the category manager, who will say that milk belongs in every slot. The strip suggests a different item, which is cross-sell; suggesting a bigger pack of the same item is upsell, a question for another day.</a:t>
             </a:r>
           </a:p>
         </p:txBody>
@@ -40750,8 +40801,8 @@
         </p:blipFill>
         <p:spPr>
           <a:xfrm>
-            <a:off x="2111716" y="1664208"/>
-            <a:ext cx="7968261" cy="3215640"/>
+            <a:off x="2282914" y="1664208"/>
+            <a:ext cx="7625865" cy="3077464"/>
           </a:xfrm>
           <a:prstGeom prst="rect">
             <a:avLst/>
@@ -40766,7 +40817,7 @@
         </p:nvSpPr>
         <p:spPr>
           <a:xfrm>
-            <a:off x="530352" y="4916424"/>
+            <a:off x="530352" y="4778248"/>
             <a:ext cx="11130991" cy="316992"/>
           </a:xfrm>
           <a:prstGeom prst="rect">
@@ -40801,28 +40852,28 @@
         </p:nvSpPr>
         <p:spPr>
           <a:xfrm>
-            <a:off x="530352" y="5242560"/>
-            <a:ext cx="11130991" cy="957072"/>
-          </a:xfrm>
-          <a:prstGeom prst="rect">
-            <a:avLst/>
-          </a:prstGeom>
-          <a:noFill/>
-        </p:spPr>
-        <p:txBody>
-          <a:bodyPr wrap="square" anchor="t" lIns="0" rIns="0" tIns="0" bIns="0">
-            <a:spAutoFit/>
-          </a:bodyPr>
-          <a:lstStyle/>
-          <a:p>
-            <a:r>
-              <a:rPr sz="1600" b="0" i="0">
+            <a:off x="530352" y="5104384"/>
+            <a:ext cx="11130991" cy="1095247"/>
+          </a:xfrm>
+          <a:prstGeom prst="rect">
+            <a:avLst/>
+          </a:prstGeom>
+          <a:noFill/>
+        </p:spPr>
+        <p:txBody>
+          <a:bodyPr wrap="square" anchor="t" lIns="0" rIns="0" tIns="0" bIns="0">
+            <a:spAutoFit/>
+          </a:bodyPr>
+          <a:lstStyle/>
+          <a:p>
+            <a:r>
+              <a:rPr sz="1400" b="0" i="0">
                 <a:solidFill>
                   <a:srgbClr val="1A1440"/>
                 </a:solidFill>
                 <a:latin typeface="Calibri"/>
               </a:rPr>
-              <a:t>If chai and biscuit ignored each other, 60 percent of the 4 biscuit orders, 2.4 orders, would hold chai. Three do. Lift is 3 / 2.4 = 1.25, and from biscuit's side it is 0.75 / 0.60, the same 1.25. The pair turns up a quarter more often than chance would put it there; ten receipts cannot say why.</a:t>
+              <a:t>If chai and biscuit ignored each other, 60 percent of the 4 biscuit orders, 2.4 orders, would hold chai. Three do, so lift is 3 / 2.4 = 1.25. Lift is also a confidence over the partner's own share, so it reads the same from both sides: chai to biscuit 0.50 / 0.40 = 1.25, and biscuit to chai 0.75 / 0.60 = 1.25. The pair turns up a quarter more often than chance would put it there; ten receipts cannot say why.</a:t>
             </a:r>
           </a:p>
         </p:txBody>
@@ -41428,7 +41479,7 @@
                 </a:solidFill>
                 <a:latin typeface="Calibri"/>
               </a:rPr>
-              <a:t>Add a carry bag, invented, in 9 of the 10 orders and in 3 of the 4 biscuit orders. Confidence from biscuit to bag is 0.75, which sounds like a bundle. The bag is in 0.90 of all orders, so lift is 0.75 / 0.90 = 0.83: biscuit orders hold a bag a little less often than orders in general. The item in every bag earns high confidence toward everything.</a:t>
+              <a:t>Add a carry bag, invented, in 9 of the 10 orders and in 3 of the 4 biscuit orders. Confidence from biscuit to bag is 0.75, which sounds like a bundle. The bag is in 0.90 of all orders, so lift, the confidence over the bag's own share, is 0.75 / 0.90 = 0.83: biscuit orders hold a bag a little less often than orders in general. The item in every bag earns high confidence toward everything.</a:t>
             </a:r>
           </a:p>
         </p:txBody>
@@ -41906,7 +41957,7 @@
                 </a:solidFill>
                 <a:latin typeface="Georgia"/>
               </a:rPr>
-              <a:t>Twelve real carts: milk in 8, bread in 4</a:t>
+              <a:t>Twelve carts from the 40,000: milk in 8, bread in 4</a:t>
             </a:r>
           </a:p>
         </p:txBody>

--- a/content/W04/D3/slides/C2_W04_D03_half1_STUDENT.pptx
+++ b/content/W04/D3/slides/C2_W04_D03_half1_STUDENT.pptx
@@ -2776,7 +2776,17 @@
           </a:p>
           <a:p>
             <a:r>
-              <a:t>the Rs 9 assumption gives it. Explorer: scene W4, the strip simulator, rank by count against rank</a:t>
+              <a:t>the Rs 9 assumption gives it. Back to S30's thin pair: on about 2,400 views a day in place of milk</a:t>
+            </a:r>
+          </a:p>
+          <a:p>
+            <a:r>
+              <a:t>it earns about Rs 17,000 a month, 4 percent of a full slot's Rs 4.2 lakh, so there the floor is</a:t>
+            </a:r>
+          </a:p>
+          <a:p>
+            <a:r>
+              <a:t>doing a money job. Explorer: scene W4, the strip simulator, rank by count against rank</a:t>
             </a:r>
           </a:p>
           <a:p>
@@ -31421,7 +31431,7 @@
         <p:spPr>
           <a:xfrm>
             <a:off x="530352" y="1956816"/>
-            <a:ext cx="11130991" cy="1877568"/>
+            <a:ext cx="11130991" cy="2153920"/>
           </a:xfrm>
           <a:prstGeom prst="rect">
             <a:avLst/>
@@ -31446,7 +31456,7 @@
                 </a:solidFill>
                 <a:latin typeface="Calibri"/>
               </a:rPr>
-              <a:t>Ice cream and chocolate sauce read lift 4.60, the strongest pair between 0.2 percent (80 carts, too few even to trial below it) and the 1 percent floor. The pair is real, 100 carts where chance gives 22, but the strip suggests it only beside ice cream, in 1,600 carts over four weeks, so a rule for it earns little. It goes on a watch list: for two weeks in two zones, a random half of shoppers see it, and it takes the slot on ice-cream carts only if it beats the next-best suggestion there. Acting on lift alone is the trap a floor exists to stop.</a:t>
+              <a:t>Ice cream and chocolate sauce read lift 4.60, the strongest pair between 0.2 percent (80 carts, too few even to trial below it) and the 1 percent floor. The pair is real, 100 carts where chance gives 22, but the strip suggests it only beside ice cream, which is in 4 percent of carts: about 2,400 of the strip's 60,000 views a day, if views follow carts, so a rule for it reaches few shoppers and earns little. It goes on a watch list: for two weeks in two zones, a random half of shoppers see it, and it takes the slot on ice-cream carts only if those shoppers earn more margin on their ice-cream carts than the other half, by a gap set before the trial. Acting on lift alone is the trap a floor exists to stop.</a:t>
             </a:r>
           </a:p>
         </p:txBody>

--- a/content/W04/D3/slides/C2_W04_D03_half1_STUDENT.pptx
+++ b/content/W04/D3/slides/C2_W04_D03_half1_STUDENT.pptx
@@ -2866,7 +2866,22 @@
           </a:p>
           <a:p>
             <a:r>
-              <a:t>add falls by the discount. Transition: what the counts cannot tell us.</a:t>
+              <a:t>add falls by the discount. Then, before S34, the prediction for its heavy-buyer row: the top tenth of</a:t>
+            </a:r>
+          </a:p>
+          <a:p>
+            <a:r>
+              <a:t>customers place 38 percent of carts; with every customer counted once, does chips and cold drink's</a:t>
+            </a:r>
+          </a:p>
+          <a:p>
+            <a:r>
+              <a:t>3.39 stay above 3, fall to about 2.5, or fall to about one? Hands up, then S34. Transition: what the</a:t>
+            </a:r>
+          </a:p>
+          <a:p>
+            <a:r>
+              <a:t>counts cannot tell us.</a:t>
             </a:r>
           </a:p>
         </p:txBody>

--- a/content/W04/D3/slides/C2_W04_D03_half1_STUDENT.pptx
+++ b/content/W04/D3/slides/C2_W04_D03_half1_STUDENT.pptx
@@ -2776,17 +2776,17 @@
           </a:p>
           <a:p>
             <a:r>
-              <a:t>the Rs 9 assumption gives it. Back to S30's thin pair: on about 2,400 views a day in place of milk</a:t>
-            </a:r>
-          </a:p>
-          <a:p>
-            <a:r>
-              <a:t>it earns about Rs 17,000 a month, 4 percent of a full slot's Rs 4.2 lakh, so there the floor is</a:t>
-            </a:r>
-          </a:p>
-          <a:p>
-            <a:r>
-              <a:t>doing a money job. Explorer: scene W4, the strip simulator, rank by count against rank</a:t>
+              <a:t>the Rs 9 assumption gives it. Back to S30's thin pair, priced at its own margins, Rs 37.40 for</a:t>
+            </a:r>
+          </a:p>
+          <a:p>
+            <a:r>
+              <a:t>sauce against Rs 2 for milk: on about 2,400 views a day in place of milk it earns about Rs 85,000 a</a:t>
+            </a:r>
+          </a:p>
+          <a:p>
+            <a:r>
+              <a:t>month, which is why it earns a test and never a blind slot. Explorer: scene W4, the strip simulator, rank by count against rank</a:t>
             </a:r>
           </a:p>
           <a:p>
@@ -31471,7 +31471,7 @@
                 </a:solidFill>
                 <a:latin typeface="Calibri"/>
               </a:rPr>
-              <a:t>Ice cream and chocolate sauce read lift 4.60, the strongest pair between 0.2 percent (80 carts, too few even to trial below it) and the 1 percent floor. The pair is real, 100 carts where chance gives 22, but the strip suggests it only beside ice cream, which is in 4 percent of carts: about 2,400 of the strip's 60,000 views a day, if views follow carts, so a rule for it reaches few shoppers and earns little. It goes on a watch list: for two weeks in two zones, a random half of shoppers see it, and it takes the slot on ice-cream carts only if those shoppers earn more margin on their ice-cream carts than the other half, by a gap set before the trial. Acting on lift alone is the trap a floor exists to stop.</a:t>
+              <a:t>Ice cream and chocolate sauce read lift 4.60, the strongest pair between 0.2 percent (80 carts, too few even to trial below it) and the 1 percent floor. The pair is real, 100 carts where chance gives 22, but the strip suggests it only beside ice cream, which is in 4 percent of carts: about 2,400 of the strip's 60,000 views a day, if views follow carts, and 100 carts cannot say how shoppers will click it there. It goes on a watch list: in two zones, a random half of shoppers see it beside ice cream, and it takes the slot only if their ice-cream carts buy sauce more often than the other half's, by a gap set before the trial, with margin per shopper as the guardrail. Acting on lift alone is the trap a floor exists to stop.</a:t>
             </a:r>
           </a:p>
         </p:txBody>
